--- a/index/designs/y8-l8/l5-text2-butai/l5-text2-butai.pptx
+++ b/index/designs/y8-l8/l5-text2-butai/l5-text2-butai.pptx
@@ -2109,12 +2109,6 @@
               </a:rPr>
               <a:t>电视</a:t>
             </a:r>
-            <a:pPr algn="ctr" indent="0" marL="0">
-              <a:spcBef>
-                <a:spcPts val="1000"/>
-              </a:spcBef>
-              <a:buNone/>
-            </a:pPr>
             <a:r>
               <a:rPr lang="en-US" sz="4000" b="1" dirty="0">
                 <a:solidFill>
@@ -2126,12 +2120,6 @@
               </a:rPr>
               <a:t>·</a:t>
             </a:r>
-            <a:pPr algn="ctr" indent="0" marL="0">
-              <a:spcBef>
-                <a:spcPts val="1000"/>
-              </a:spcBef>
-              <a:buNone/>
-            </a:pPr>
             <a:r>
               <a:rPr lang="en-US" sz="4000" dirty="0">
                 <a:solidFill>
@@ -2143,12 +2131,6 @@
               </a:rPr>
               <a:t>电影</a:t>
             </a:r>
-            <a:pPr algn="ctr" indent="0" marL="0">
-              <a:spcBef>
-                <a:spcPts val="1000"/>
-              </a:spcBef>
-              <a:buNone/>
-            </a:pPr>
             <a:r>
               <a:rPr lang="en-US" sz="4000" b="1" dirty="0">
                 <a:solidFill>
@@ -2160,12 +2142,6 @@
               </a:rPr>
               <a:t>·</a:t>
             </a:r>
-            <a:pPr algn="ctr" indent="0" marL="0">
-              <a:spcBef>
-                <a:spcPts val="1000"/>
-              </a:spcBef>
-              <a:buNone/>
-            </a:pPr>
             <a:r>
               <a:rPr lang="en-US" sz="4000" dirty="0">
                 <a:solidFill>
@@ -2774,9 +2750,6 @@
               </a:rPr>
               <a:t>In pairs, perform the </a:t>
             </a:r>
-            <a:pPr algn="l" indent="0" marL="0">
-              <a:buNone/>
-            </a:pPr>
             <a:r>
               <a:rPr lang="en-US" sz="1050" b="1" dirty="0">
                 <a:solidFill>
@@ -2806,9 +2779,6 @@
               </a:rPr>
               <a:t>Then </a:t>
             </a:r>
-            <a:pPr algn="l" indent="0" marL="0">
-              <a:buNone/>
-            </a:pPr>
             <a:r>
               <a:rPr lang="en-US" sz="1050" b="1" dirty="0">
                 <a:solidFill>
@@ -2820,9 +2790,6 @@
               </a:rPr>
               <a:t>repeat it</a:t>
             </a:r>
-            <a:pPr algn="l" indent="0" marL="0">
-              <a:buNone/>
-            </a:pPr>
             <a:r>
               <a:rPr lang="en-US" sz="1050" dirty="0">
                 <a:solidFill>
@@ -2995,15 +2962,6 @@
               </a:rPr>
               <a:t>Word bank support: </a:t>
             </a:r>
-            <a:pPr algn="l" indent="0" marL="0">
-              <a:lnSpc>
-                <a:spcPts val="1425"/>
-              </a:lnSpc>
-              <a:spcBef>
-                <a:spcPts val="800"/>
-              </a:spcBef>
-              <a:buNone/>
-            </a:pPr>
             <a:r>
               <a:rPr lang="en-US" sz="950" b="1" dirty="0">
                 <a:solidFill>
@@ -3015,15 +2973,6 @@
               </a:rPr>
               <a:t>体育节目</a:t>
             </a:r>
-            <a:pPr algn="l" indent="0" marL="0">
-              <a:lnSpc>
-                <a:spcPts val="1425"/>
-              </a:lnSpc>
-              <a:spcBef>
-                <a:spcPts val="800"/>
-              </a:spcBef>
-              <a:buNone/>
-            </a:pPr>
             <a:r>
               <a:rPr lang="en-US" sz="950" dirty="0">
                 <a:solidFill>
@@ -3926,9 +3875,6 @@
               </a:rPr>
               <a:t>Going around the room, each student says </a:t>
             </a:r>
-            <a:pPr algn="l" indent="0" marL="0">
-              <a:buNone/>
-            </a:pPr>
             <a:r>
               <a:rPr lang="en-US" sz="1050" b="1" dirty="0">
                 <a:solidFill>
@@ -3940,9 +3886,6 @@
               </a:rPr>
               <a:t>one thing they 不太喜欢</a:t>
             </a:r>
-            <a:pPr algn="l" indent="0" marL="0">
-              <a:buNone/>
-            </a:pPr>
             <a:r>
               <a:rPr lang="en-US" sz="1050" dirty="0">
                 <a:solidFill>
@@ -3954,9 +3897,6 @@
               </a:rPr>
               <a:t> and </a:t>
             </a:r>
-            <a:pPr algn="l" indent="0" marL="0">
-              <a:buNone/>
-            </a:pPr>
             <a:r>
               <a:rPr lang="en-US" sz="1050" b="1" dirty="0">
                 <a:solidFill>
@@ -3968,9 +3908,6 @@
               </a:rPr>
               <a:t>one thing they like instead</a:t>
             </a:r>
-            <a:pPr algn="l" indent="0" marL="0">
-              <a:buNone/>
-            </a:pPr>
             <a:r>
               <a:rPr lang="en-US" sz="1050" dirty="0">
                 <a:solidFill>
@@ -4000,9 +3937,6 @@
               </a:rPr>
               <a:t>No repeats allowed</a:t>
             </a:r>
-            <a:pPr algn="l" indent="0" marL="0">
-              <a:buNone/>
-            </a:pPr>
             <a:r>
               <a:rPr lang="en-US" sz="1050" dirty="0">
                 <a:solidFill>
@@ -4180,9 +4114,6 @@
               </a:rPr>
               <a:t>我不太喜欢</a:t>
             </a:r>
-            <a:pPr algn="l" indent="0" marL="0">
-              <a:buNone/>
-            </a:pPr>
             <a:r>
               <a:rPr lang="en-US" sz="1300" b="1" dirty="0">
                 <a:solidFill>
@@ -4194,9 +4125,6 @@
               </a:rPr>
               <a:t>____</a:t>
             </a:r>
-            <a:pPr algn="l" indent="0" marL="0">
-              <a:buNone/>
-            </a:pPr>
             <a:r>
               <a:rPr lang="en-US" sz="1300" dirty="0">
                 <a:solidFill>
@@ -4208,9 +4136,6 @@
               </a:rPr>
               <a:t>，但是我喜欢</a:t>
             </a:r>
-            <a:pPr algn="l" indent="0" marL="0">
-              <a:buNone/>
-            </a:pPr>
             <a:r>
               <a:rPr lang="en-US" sz="1300" b="1" dirty="0">
                 <a:solidFill>
@@ -4222,9 +4147,6 @@
               </a:rPr>
               <a:t>____</a:t>
             </a:r>
-            <a:pPr algn="l" indent="0" marL="0">
-              <a:buNone/>
-            </a:pPr>
             <a:r>
               <a:rPr lang="en-US" sz="1300" dirty="0">
                 <a:solidFill>
@@ -5169,9 +5091,6 @@
               </a:rPr>
               <a:t>In </a:t>
             </a:r>
-            <a:pPr algn="l" indent="0" marL="0">
-              <a:buNone/>
-            </a:pPr>
             <a:r>
               <a:rPr lang="en-US" sz="1050" b="1" dirty="0">
                 <a:solidFill>
@@ -5201,9 +5120,6 @@
               </a:rPr>
               <a:t>Each student says </a:t>
             </a:r>
-            <a:pPr algn="l" indent="0" marL="0">
-              <a:buNone/>
-            </a:pPr>
             <a:r>
               <a:rPr lang="en-US" sz="1050" b="1" dirty="0">
                 <a:solidFill>
@@ -5215,9 +5131,6 @@
               </a:rPr>
               <a:t>three sentences</a:t>
             </a:r>
-            <a:pPr algn="l" indent="0" marL="0">
-              <a:buNone/>
-            </a:pPr>
             <a:r>
               <a:rPr lang="en-US" sz="1050" dirty="0">
                 <a:solidFill>
@@ -5229,9 +5142,6 @@
               </a:rPr>
               <a:t> about their own likes/dislikes using </a:t>
             </a:r>
-            <a:pPr algn="l" indent="0" marL="0">
-              <a:buNone/>
-            </a:pPr>
             <a:r>
               <a:rPr lang="en-US" sz="1050" b="1" dirty="0">
                 <a:solidFill>
@@ -5243,9 +5153,6 @@
               </a:rPr>
               <a:t>喜欢 / 不太喜欢</a:t>
             </a:r>
-            <a:pPr algn="l" indent="0" marL="0">
-              <a:buNone/>
-            </a:pPr>
             <a:r>
               <a:rPr lang="en-US" sz="1050" dirty="0">
                 <a:solidFill>
@@ -5275,9 +5182,6 @@
               </a:rPr>
               <a:t>The group </a:t>
             </a:r>
-            <a:pPr algn="l" indent="0" marL="0">
-              <a:buNone/>
-            </a:pPr>
             <a:r>
               <a:rPr lang="en-US" sz="1050" b="1" dirty="0">
                 <a:solidFill>
@@ -5289,9 +5193,6 @@
               </a:rPr>
               <a:t>guesses which is the lie</a:t>
             </a:r>
-            <a:pPr algn="l" indent="0" marL="0">
-              <a:buNone/>
-            </a:pPr>
             <a:r>
               <a:rPr lang="en-US" sz="1050" dirty="0">
                 <a:solidFill>
@@ -5452,9 +5353,6 @@
               </a:rPr>
               <a:t>1</a:t>
             </a:r>
-            <a:pPr algn="l" indent="0" marL="0">
-              <a:buNone/>
-            </a:pPr>
             <a:r>
               <a:rPr lang="en-US" sz="1000" dirty="0">
                 <a:solidFill>
@@ -5466,9 +5364,6 @@
               </a:rPr>
               <a:t> </a:t>
             </a:r>
-            <a:pPr algn="l" indent="0" marL="0">
-              <a:buNone/>
-            </a:pPr>
             <a:r>
               <a:rPr lang="en-US" sz="1000" b="1" dirty="0">
                 <a:solidFill>
@@ -5555,9 +5450,6 @@
               </a:rPr>
               <a:t>2</a:t>
             </a:r>
-            <a:pPr algn="l" indent="0" marL="0">
-              <a:buNone/>
-            </a:pPr>
             <a:r>
               <a:rPr lang="en-US" sz="1000" dirty="0">
                 <a:solidFill>
@@ -5569,9 +5461,6 @@
               </a:rPr>
               <a:t> </a:t>
             </a:r>
-            <a:pPr algn="l" indent="0" marL="0">
-              <a:buNone/>
-            </a:pPr>
             <a:r>
               <a:rPr lang="en-US" sz="1000" b="1" dirty="0">
                 <a:solidFill>
@@ -5658,9 +5547,6 @@
               </a:rPr>
               <a:t>3</a:t>
             </a:r>
-            <a:pPr algn="l" indent="0" marL="0">
-              <a:buNone/>
-            </a:pPr>
             <a:r>
               <a:rPr lang="en-US" sz="1000" dirty="0">
                 <a:solidFill>
@@ -5672,9 +5558,6 @@
               </a:rPr>
               <a:t> </a:t>
             </a:r>
-            <a:pPr algn="l" indent="0" marL="0">
-              <a:buNone/>
-            </a:pPr>
             <a:r>
               <a:rPr lang="en-US" sz="1000" b="1" dirty="0">
                 <a:solidFill>
@@ -6432,9 +6315,6 @@
               </a:rPr>
               <a:t>👍😐👎</a:t>
             </a:r>
-            <a:pPr algn="l" indent="0" marL="0">
-              <a:buNone/>
-            </a:pPr>
             <a:r>
               <a:rPr lang="en-US" sz="950" dirty="0">
                 <a:solidFill>
@@ -6485,9 +6365,6 @@
               </a:rPr>
               <a:t>👍😐👎</a:t>
             </a:r>
-            <a:pPr algn="l" indent="0" marL="0">
-              <a:buNone/>
-            </a:pPr>
             <a:r>
               <a:rPr lang="en-US" sz="950" dirty="0">
                 <a:solidFill>
@@ -6538,9 +6415,6 @@
               </a:rPr>
               <a:t>👍😐👎</a:t>
             </a:r>
-            <a:pPr algn="l" indent="0" marL="0">
-              <a:buNone/>
-            </a:pPr>
             <a:r>
               <a:rPr lang="en-US" sz="950" dirty="0">
                 <a:solidFill>
@@ -6807,12 +6681,6 @@
               <a:t>A student volunteer reads each Success Criterion aloud; class responds with a matching example sentence.
 </a:t>
             </a:r>
-            <a:pPr algn="l" indent="0" marL="0">
-              <a:lnSpc>
-                <a:spcPts val="1275"/>
-              </a:lnSpc>
-              <a:buNone/>
-            </a:pPr>
             <a:r>
               <a:rPr lang="en-US" sz="850" b="1" dirty="0">
                 <a:solidFill>
@@ -6824,12 +6692,6 @@
               </a:rPr>
               <a:t>Self-assessment:</a:t>
             </a:r>
-            <a:pPr algn="l" indent="0" marL="0">
-              <a:lnSpc>
-                <a:spcPts val="1275"/>
-              </a:lnSpc>
-              <a:buNone/>
-            </a:pPr>
             <a:r>
               <a:rPr lang="en-US" sz="850" dirty="0">
                 <a:solidFill>
@@ -7970,9 +7832,6 @@
               </a:rPr>
               <a:t>In pairs, </a:t>
             </a:r>
-            <a:pPr algn="l" indent="0" marL="0">
-              <a:buNone/>
-            </a:pPr>
             <a:r>
               <a:rPr lang="en-US" sz="1100" b="1" dirty="0">
                 <a:solidFill>
@@ -7984,9 +7843,6 @@
               </a:rPr>
               <a:t>recreate yesterday's duration Q&amp;A</a:t>
             </a:r>
-            <a:pPr algn="l" indent="0" marL="0">
-              <a:buNone/>
-            </a:pPr>
             <a:r>
               <a:rPr lang="en-US" sz="1100" dirty="0">
                 <a:solidFill>
@@ -8016,9 +7872,6 @@
               </a:rPr>
               <a:t>Swap roles</a:t>
             </a:r>
-            <a:pPr algn="l" indent="0" marL="0">
-              <a:buNone/>
-            </a:pPr>
             <a:r>
               <a:rPr lang="en-US" sz="1100" dirty="0">
                 <a:solidFill>
@@ -8030,9 +7883,6 @@
               </a:rPr>
               <a:t>, then repeat the dialogue with a </a:t>
             </a:r>
-            <a:pPr algn="l" indent="0" marL="0">
-              <a:buNone/>
-            </a:pPr>
             <a:r>
               <a:rPr lang="en-US" sz="1100" b="1" dirty="0">
                 <a:solidFill>
@@ -8178,9 +8028,6 @@
               </a:rPr>
               <a:t>你每天/每个星期打</a:t>
             </a:r>
-            <a:pPr algn="l" indent="0" marL="0">
-              <a:buNone/>
-            </a:pPr>
             <a:r>
               <a:rPr lang="en-US" sz="1400" b="1" dirty="0">
                 <a:solidFill>
@@ -8192,9 +8039,6 @@
               </a:rPr>
               <a:t>几个小时</a:t>
             </a:r>
-            <a:pPr algn="l" indent="0" marL="0">
-              <a:buNone/>
-            </a:pPr>
             <a:r>
               <a:rPr lang="en-US" sz="1400" dirty="0">
                 <a:solidFill>
@@ -8300,9 +8144,6 @@
               </a:rPr>
               <a:t>"So far every sentence has been about liking something. Today you'll learn to say you </a:t>
             </a:r>
-            <a:pPr algn="l" indent="0" marL="0">
-              <a:buNone/>
-            </a:pPr>
             <a:r>
               <a:rPr lang="en-US" sz="1000" b="1" dirty="0">
                 <a:solidFill>
@@ -8314,9 +8155,6 @@
               </a:rPr>
               <a:t>don't</a:t>
             </a:r>
-            <a:pPr algn="l" indent="0" marL="0">
-              <a:buNone/>
-            </a:pPr>
             <a:r>
               <a:rPr lang="en-US" sz="1000" dirty="0">
                 <a:solidFill>
@@ -8712,9 +8550,6 @@
               </a:rPr>
               <a:t>We are learning to talk about </a:t>
             </a:r>
-            <a:pPr algn="l" indent="0" marL="0">
-              <a:buNone/>
-            </a:pPr>
             <a:r>
               <a:rPr lang="en-US" sz="1400" b="1" dirty="0">
                 <a:solidFill>
@@ -8726,9 +8561,6 @@
               </a:rPr>
               <a:t>TV, movies, and weekends</a:t>
             </a:r>
-            <a:pPr algn="l" indent="0" marL="0">
-              <a:buNone/>
-            </a:pPr>
             <a:r>
               <a:rPr lang="en-US" sz="1400" dirty="0">
                 <a:solidFill>
@@ -8740,9 +8572,6 @@
               </a:rPr>
               <a:t>, and to use </a:t>
             </a:r>
-            <a:pPr algn="l" indent="0" marL="0">
-              <a:buNone/>
-            </a:pPr>
             <a:r>
               <a:rPr lang="en-US" sz="1400" b="1" dirty="0">
                 <a:solidFill>
@@ -8754,9 +8583,6 @@
               </a:rPr>
               <a:t>不太</a:t>
             </a:r>
-            <a:pPr algn="l" indent="0" marL="0">
-              <a:buNone/>
-            </a:pPr>
             <a:r>
               <a:rPr lang="en-US" sz="1400" dirty="0">
                 <a:solidFill>
@@ -8846,9 +8672,6 @@
               </a:rPr>
               <a:t>I can say </a:t>
             </a:r>
-            <a:pPr algn="l" indent="0" marL="0">
-              <a:buNone/>
-            </a:pPr>
             <a:r>
               <a:rPr lang="en-US" sz="1150" b="1" dirty="0">
                 <a:solidFill>
@@ -8860,9 +8683,6 @@
               </a:rPr>
               <a:t>电视, 电影, 节目, 周末</a:t>
             </a:r>
-            <a:pPr algn="l" indent="0" marL="0">
-              <a:buNone/>
-            </a:pPr>
             <a:r>
               <a:rPr lang="en-US" sz="1150" dirty="0">
                 <a:solidFill>
@@ -8874,9 +8694,6 @@
               </a:rPr>
               <a:t> in Chinese </a:t>
             </a:r>
-            <a:pPr algn="l" indent="0" marL="0">
-              <a:buNone/>
-            </a:pPr>
             <a:r>
               <a:rPr lang="en-US" sz="900" i="1" dirty="0">
                 <a:solidFill>
@@ -8966,9 +8783,6 @@
               </a:rPr>
               <a:t>I can use </a:t>
             </a:r>
-            <a:pPr algn="l" indent="0" marL="0">
-              <a:buNone/>
-            </a:pPr>
             <a:r>
               <a:rPr lang="en-US" sz="1150" dirty="0">
                 <a:solidFill>
@@ -8980,9 +8794,6 @@
               </a:rPr>
               <a:t>不太喜欢</a:t>
             </a:r>
-            <a:pPr algn="l" indent="0" marL="0">
-              <a:buNone/>
-            </a:pPr>
             <a:r>
               <a:rPr lang="en-US" sz="1150" dirty="0">
                 <a:solidFill>
@@ -9072,9 +8883,6 @@
               </a:rPr>
               <a:t>I can use </a:t>
             </a:r>
-            <a:pPr algn="l" indent="0" marL="0">
-              <a:buNone/>
-            </a:pPr>
             <a:r>
               <a:rPr lang="en-US" sz="1150" dirty="0">
                 <a:solidFill>
@@ -9086,9 +8894,6 @@
               </a:rPr>
               <a:t>但是</a:t>
             </a:r>
-            <a:pPr algn="l" indent="0" marL="0">
-              <a:buNone/>
-            </a:pPr>
             <a:r>
               <a:rPr lang="en-US" sz="1150" dirty="0">
                 <a:solidFill>
@@ -9577,9 +9382,6 @@
               </a:rPr>
               <a:t>太</a:t>
             </a:r>
-            <a:pPr algn="l" indent="0" marL="0">
-              <a:buNone/>
-            </a:pPr>
             <a:r>
               <a:rPr lang="en-US" sz="1100" dirty="0">
                 <a:solidFill>
@@ -9591,9 +9393,6 @@
               </a:rPr>
               <a:t> </a:t>
             </a:r>
-            <a:pPr algn="l" indent="0" marL="0">
-              <a:buNone/>
-            </a:pPr>
             <a:r>
               <a:rPr lang="en-US" sz="1100" dirty="0">
                 <a:solidFill>
@@ -9605,9 +9404,6 @@
               </a:rPr>
               <a:t>tài</a:t>
             </a:r>
-            <a:pPr algn="l" indent="0" marL="0">
-              <a:buNone/>
-            </a:pPr>
             <a:r>
               <a:rPr lang="en-US" sz="1100" dirty="0">
                 <a:solidFill>
@@ -9619,9 +9415,6 @@
               </a:rPr>
               <a:t> </a:t>
             </a:r>
-            <a:pPr algn="l" indent="0" marL="0">
-              <a:buNone/>
-            </a:pPr>
             <a:r>
               <a:rPr lang="en-US" sz="1100" dirty="0">
                 <a:solidFill>
@@ -9650,9 +9443,6 @@
               </a:rPr>
               <a:t>但</a:t>
             </a:r>
-            <a:pPr algn="l" indent="0" marL="0">
-              <a:buNone/>
-            </a:pPr>
             <a:r>
               <a:rPr lang="en-US" sz="1100" dirty="0">
                 <a:solidFill>
@@ -9664,9 +9454,6 @@
               </a:rPr>
               <a:t> </a:t>
             </a:r>
-            <a:pPr algn="l" indent="0" marL="0">
-              <a:buNone/>
-            </a:pPr>
             <a:r>
               <a:rPr lang="en-US" sz="1100" dirty="0">
                 <a:solidFill>
@@ -9678,9 +9465,6 @@
               </a:rPr>
               <a:t>dàn</a:t>
             </a:r>
-            <a:pPr algn="l" indent="0" marL="0">
-              <a:buNone/>
-            </a:pPr>
             <a:r>
               <a:rPr lang="en-US" sz="1100" dirty="0">
                 <a:solidFill>
@@ -9692,9 +9476,6 @@
               </a:rPr>
               <a:t> </a:t>
             </a:r>
-            <a:pPr algn="l" indent="0" marL="0">
-              <a:buNone/>
-            </a:pPr>
             <a:r>
               <a:rPr lang="en-US" sz="1100" dirty="0">
                 <a:solidFill>
@@ -9723,9 +9504,6 @@
               </a:rPr>
               <a:t>但是</a:t>
             </a:r>
-            <a:pPr algn="l" indent="0" marL="0">
-              <a:buNone/>
-            </a:pPr>
             <a:r>
               <a:rPr lang="en-US" sz="1100" dirty="0">
                 <a:solidFill>
@@ -9737,9 +9515,6 @@
               </a:rPr>
               <a:t> </a:t>
             </a:r>
-            <a:pPr algn="l" indent="0" marL="0">
-              <a:buNone/>
-            </a:pPr>
             <a:r>
               <a:rPr lang="en-US" sz="1100" dirty="0">
                 <a:solidFill>
@@ -9751,9 +9526,6 @@
               </a:rPr>
               <a:t>dànshì</a:t>
             </a:r>
-            <a:pPr algn="l" indent="0" marL="0">
-              <a:buNone/>
-            </a:pPr>
             <a:r>
               <a:rPr lang="en-US" sz="1100" dirty="0">
                 <a:solidFill>
@@ -9765,9 +9537,6 @@
               </a:rPr>
               <a:t> </a:t>
             </a:r>
-            <a:pPr algn="l" indent="0" marL="0">
-              <a:buNone/>
-            </a:pPr>
             <a:r>
               <a:rPr lang="en-US" sz="1100" dirty="0">
                 <a:solidFill>
@@ -9796,9 +9565,6 @@
               </a:rPr>
               <a:t>视(視)</a:t>
             </a:r>
-            <a:pPr algn="l" indent="0" marL="0">
-              <a:buNone/>
-            </a:pPr>
             <a:r>
               <a:rPr lang="en-US" sz="1100" dirty="0">
                 <a:solidFill>
@@ -9810,9 +9576,6 @@
               </a:rPr>
               <a:t> </a:t>
             </a:r>
-            <a:pPr algn="l" indent="0" marL="0">
-              <a:buNone/>
-            </a:pPr>
             <a:r>
               <a:rPr lang="en-US" sz="1100" dirty="0">
                 <a:solidFill>
@@ -9824,9 +9587,6 @@
               </a:rPr>
               <a:t>shì</a:t>
             </a:r>
-            <a:pPr algn="l" indent="0" marL="0">
-              <a:buNone/>
-            </a:pPr>
             <a:r>
               <a:rPr lang="en-US" sz="1100" dirty="0">
                 <a:solidFill>
@@ -9838,9 +9598,6 @@
               </a:rPr>
               <a:t> </a:t>
             </a:r>
-            <a:pPr algn="l" indent="0" marL="0">
-              <a:buNone/>
-            </a:pPr>
             <a:r>
               <a:rPr lang="en-US" sz="1100" dirty="0">
                 <a:solidFill>
@@ -9869,9 +9626,6 @@
               </a:rPr>
               <a:t>电视</a:t>
             </a:r>
-            <a:pPr algn="l" indent="0" marL="0">
-              <a:buNone/>
-            </a:pPr>
             <a:r>
               <a:rPr lang="en-US" sz="1100" dirty="0">
                 <a:solidFill>
@@ -9883,9 +9637,6 @@
               </a:rPr>
               <a:t> </a:t>
             </a:r>
-            <a:pPr algn="l" indent="0" marL="0">
-              <a:buNone/>
-            </a:pPr>
             <a:r>
               <a:rPr lang="en-US" sz="1100" dirty="0">
                 <a:solidFill>
@@ -9897,9 +9648,6 @@
               </a:rPr>
               <a:t>diànshì</a:t>
             </a:r>
-            <a:pPr algn="l" indent="0" marL="0">
-              <a:buNone/>
-            </a:pPr>
             <a:r>
               <a:rPr lang="en-US" sz="1100" dirty="0">
                 <a:solidFill>
@@ -9911,9 +9659,6 @@
               </a:rPr>
               <a:t> </a:t>
             </a:r>
-            <a:pPr algn="l" indent="0" marL="0">
-              <a:buNone/>
-            </a:pPr>
             <a:r>
               <a:rPr lang="en-US" sz="1100" dirty="0">
                 <a:solidFill>
@@ -9942,9 +9687,6 @@
               </a:rPr>
               <a:t>影</a:t>
             </a:r>
-            <a:pPr algn="l" indent="0" marL="0">
-              <a:buNone/>
-            </a:pPr>
             <a:r>
               <a:rPr lang="en-US" sz="1100" dirty="0">
                 <a:solidFill>
@@ -9956,9 +9698,6 @@
               </a:rPr>
               <a:t> </a:t>
             </a:r>
-            <a:pPr algn="l" indent="0" marL="0">
-              <a:buNone/>
-            </a:pPr>
             <a:r>
               <a:rPr lang="en-US" sz="1100" dirty="0">
                 <a:solidFill>
@@ -9970,9 +9709,6 @@
               </a:rPr>
               <a:t>yǐng</a:t>
             </a:r>
-            <a:pPr algn="l" indent="0" marL="0">
-              <a:buNone/>
-            </a:pPr>
             <a:r>
               <a:rPr lang="en-US" sz="1100" dirty="0">
                 <a:solidFill>
@@ -9984,9 +9720,6 @@
               </a:rPr>
               <a:t> </a:t>
             </a:r>
-            <a:pPr algn="l" indent="0" marL="0">
-              <a:buNone/>
-            </a:pPr>
             <a:r>
               <a:rPr lang="en-US" sz="1100" dirty="0">
                 <a:solidFill>
@@ -10015,9 +9748,6 @@
               </a:rPr>
               <a:t>电影</a:t>
             </a:r>
-            <a:pPr algn="l" indent="0" marL="0">
-              <a:buNone/>
-            </a:pPr>
             <a:r>
               <a:rPr lang="en-US" sz="1100" dirty="0">
                 <a:solidFill>
@@ -10029,9 +9759,6 @@
               </a:rPr>
               <a:t> </a:t>
             </a:r>
-            <a:pPr algn="l" indent="0" marL="0">
-              <a:buNone/>
-            </a:pPr>
             <a:r>
               <a:rPr lang="en-US" sz="1100" dirty="0">
                 <a:solidFill>
@@ -10043,9 +9770,6 @@
               </a:rPr>
               <a:t>diànyǐng</a:t>
             </a:r>
-            <a:pPr algn="l" indent="0" marL="0">
-              <a:buNone/>
-            </a:pPr>
             <a:r>
               <a:rPr lang="en-US" sz="1100" dirty="0">
                 <a:solidFill>
@@ -10057,9 +9781,6 @@
               </a:rPr>
               <a:t> </a:t>
             </a:r>
-            <a:pPr algn="l" indent="0" marL="0">
-              <a:buNone/>
-            </a:pPr>
             <a:r>
               <a:rPr lang="en-US" sz="1100" dirty="0">
                 <a:solidFill>
@@ -10142,9 +9863,6 @@
               </a:rPr>
               <a:t>节(節)</a:t>
             </a:r>
-            <a:pPr algn="l" indent="0" marL="0">
-              <a:buNone/>
-            </a:pPr>
             <a:r>
               <a:rPr lang="en-US" sz="1100" dirty="0">
                 <a:solidFill>
@@ -10156,9 +9874,6 @@
               </a:rPr>
               <a:t> </a:t>
             </a:r>
-            <a:pPr algn="l" indent="0" marL="0">
-              <a:buNone/>
-            </a:pPr>
             <a:r>
               <a:rPr lang="en-US" sz="1100" dirty="0">
                 <a:solidFill>
@@ -10170,9 +9885,6 @@
               </a:rPr>
               <a:t>jié</a:t>
             </a:r>
-            <a:pPr algn="l" indent="0" marL="0">
-              <a:buNone/>
-            </a:pPr>
             <a:r>
               <a:rPr lang="en-US" sz="1100" dirty="0">
                 <a:solidFill>
@@ -10184,9 +9896,6 @@
               </a:rPr>
               <a:t> </a:t>
             </a:r>
-            <a:pPr algn="l" indent="0" marL="0">
-              <a:buNone/>
-            </a:pPr>
             <a:r>
               <a:rPr lang="en-US" sz="1100" dirty="0">
                 <a:solidFill>
@@ -10215,9 +9924,6 @@
               </a:rPr>
               <a:t>节目</a:t>
             </a:r>
-            <a:pPr algn="l" indent="0" marL="0">
-              <a:buNone/>
-            </a:pPr>
             <a:r>
               <a:rPr lang="en-US" sz="1100" dirty="0">
                 <a:solidFill>
@@ -10229,9 +9935,6 @@
               </a:rPr>
               <a:t> </a:t>
             </a:r>
-            <a:pPr algn="l" indent="0" marL="0">
-              <a:buNone/>
-            </a:pPr>
             <a:r>
               <a:rPr lang="en-US" sz="1100" dirty="0">
                 <a:solidFill>
@@ -10243,9 +9946,6 @@
               </a:rPr>
               <a:t>jiémù</a:t>
             </a:r>
-            <a:pPr algn="l" indent="0" marL="0">
-              <a:buNone/>
-            </a:pPr>
             <a:r>
               <a:rPr lang="en-US" sz="1100" dirty="0">
                 <a:solidFill>
@@ -10257,9 +9957,6 @@
               </a:rPr>
               <a:t> </a:t>
             </a:r>
-            <a:pPr algn="l" indent="0" marL="0">
-              <a:buNone/>
-            </a:pPr>
             <a:r>
               <a:rPr lang="en-US" sz="1100" dirty="0">
                 <a:solidFill>
@@ -10288,9 +9985,6 @@
               </a:rPr>
               <a:t>差不多</a:t>
             </a:r>
-            <a:pPr algn="l" indent="0" marL="0">
-              <a:buNone/>
-            </a:pPr>
             <a:r>
               <a:rPr lang="en-US" sz="1100" dirty="0">
                 <a:solidFill>
@@ -10302,9 +9996,6 @@
               </a:rPr>
               <a:t> </a:t>
             </a:r>
-            <a:pPr algn="l" indent="0" marL="0">
-              <a:buNone/>
-            </a:pPr>
             <a:r>
               <a:rPr lang="en-US" sz="1100" dirty="0">
                 <a:solidFill>
@@ -10316,9 +10007,6 @@
               </a:rPr>
               <a:t>chàbuduō</a:t>
             </a:r>
-            <a:pPr algn="l" indent="0" marL="0">
-              <a:buNone/>
-            </a:pPr>
             <a:r>
               <a:rPr lang="en-US" sz="1100" dirty="0">
                 <a:solidFill>
@@ -10330,9 +10018,6 @@
               </a:rPr>
               <a:t> </a:t>
             </a:r>
-            <a:pPr algn="l" indent="0" marL="0">
-              <a:buNone/>
-            </a:pPr>
             <a:r>
               <a:rPr lang="en-US" sz="1100" dirty="0">
                 <a:solidFill>
@@ -10361,9 +10046,6 @@
               </a:rPr>
               <a:t>周</a:t>
             </a:r>
-            <a:pPr algn="l" indent="0" marL="0">
-              <a:buNone/>
-            </a:pPr>
             <a:r>
               <a:rPr lang="en-US" sz="1100" dirty="0">
                 <a:solidFill>
@@ -10375,9 +10057,6 @@
               </a:rPr>
               <a:t> </a:t>
             </a:r>
-            <a:pPr algn="l" indent="0" marL="0">
-              <a:buNone/>
-            </a:pPr>
             <a:r>
               <a:rPr lang="en-US" sz="1100" dirty="0">
                 <a:solidFill>
@@ -10389,9 +10068,6 @@
               </a:rPr>
               <a:t>zhōu</a:t>
             </a:r>
-            <a:pPr algn="l" indent="0" marL="0">
-              <a:buNone/>
-            </a:pPr>
             <a:r>
               <a:rPr lang="en-US" sz="1100" dirty="0">
                 <a:solidFill>
@@ -10403,9 +10079,6 @@
               </a:rPr>
               <a:t> </a:t>
             </a:r>
-            <a:pPr algn="l" indent="0" marL="0">
-              <a:buNone/>
-            </a:pPr>
             <a:r>
               <a:rPr lang="en-US" sz="1100" dirty="0">
                 <a:solidFill>
@@ -10434,9 +10107,6 @@
               </a:rPr>
               <a:t>末</a:t>
             </a:r>
-            <a:pPr algn="l" indent="0" marL="0">
-              <a:buNone/>
-            </a:pPr>
             <a:r>
               <a:rPr lang="en-US" sz="1100" dirty="0">
                 <a:solidFill>
@@ -10448,9 +10118,6 @@
               </a:rPr>
               <a:t> </a:t>
             </a:r>
-            <a:pPr algn="l" indent="0" marL="0">
-              <a:buNone/>
-            </a:pPr>
             <a:r>
               <a:rPr lang="en-US" sz="1100" dirty="0">
                 <a:solidFill>
@@ -10462,9 +10129,6 @@
               </a:rPr>
               <a:t>mò</a:t>
             </a:r>
-            <a:pPr algn="l" indent="0" marL="0">
-              <a:buNone/>
-            </a:pPr>
             <a:r>
               <a:rPr lang="en-US" sz="1100" dirty="0">
                 <a:solidFill>
@@ -10476,9 +10140,6 @@
               </a:rPr>
               <a:t> </a:t>
             </a:r>
-            <a:pPr algn="l" indent="0" marL="0">
-              <a:buNone/>
-            </a:pPr>
             <a:r>
               <a:rPr lang="en-US" sz="1100" dirty="0">
                 <a:solidFill>
@@ -10507,9 +10168,6 @@
               </a:rPr>
               <a:t>周末</a:t>
             </a:r>
-            <a:pPr algn="l" indent="0" marL="0">
-              <a:buNone/>
-            </a:pPr>
             <a:r>
               <a:rPr lang="en-US" sz="1100" dirty="0">
                 <a:solidFill>
@@ -10521,9 +10179,6 @@
               </a:rPr>
               <a:t> </a:t>
             </a:r>
-            <a:pPr algn="l" indent="0" marL="0">
-              <a:buNone/>
-            </a:pPr>
             <a:r>
               <a:rPr lang="en-US" sz="1100" dirty="0">
                 <a:solidFill>
@@ -10535,9 +10190,6 @@
               </a:rPr>
               <a:t>zhōumò</a:t>
             </a:r>
-            <a:pPr algn="l" indent="0" marL="0">
-              <a:buNone/>
-            </a:pPr>
             <a:r>
               <a:rPr lang="en-US" sz="1100" dirty="0">
                 <a:solidFill>
@@ -10549,9 +10201,6 @@
               </a:rPr>
               <a:t> </a:t>
             </a:r>
-            <a:pPr algn="l" indent="0" marL="0">
-              <a:buNone/>
-            </a:pPr>
             <a:r>
               <a:rPr lang="en-US" sz="1100" dirty="0">
                 <a:solidFill>
@@ -10679,9 +10328,6 @@
               </a:rPr>
               <a:t>电</a:t>
             </a:r>
-            <a:pPr algn="l" indent="0" marL="0">
-              <a:buNone/>
-            </a:pPr>
             <a:r>
               <a:rPr lang="en-US" sz="1050" dirty="0">
                 <a:solidFill>
@@ -10693,9 +10339,6 @@
               </a:rPr>
               <a:t> (electric) appears in both </a:t>
             </a:r>
-            <a:pPr algn="l" indent="0" marL="0">
-              <a:buNone/>
-            </a:pPr>
             <a:r>
               <a:rPr lang="en-US" sz="1050" b="1" dirty="0">
                 <a:solidFill>
@@ -10707,9 +10350,6 @@
               </a:rPr>
               <a:t>电视</a:t>
             </a:r>
-            <a:pPr algn="l" indent="0" marL="0">
-              <a:buNone/>
-            </a:pPr>
             <a:r>
               <a:rPr lang="en-US" sz="1050" dirty="0">
                 <a:solidFill>
@@ -10721,9 +10361,6 @@
               </a:rPr>
               <a:t> and </a:t>
             </a:r>
-            <a:pPr algn="l" indent="0" marL="0">
-              <a:buNone/>
-            </a:pPr>
             <a:r>
               <a:rPr lang="en-US" sz="1050" b="1" dirty="0">
                 <a:solidFill>
@@ -11162,9 +10799,6 @@
               </a:rPr>
               <a:t>我不太喜欢 </a:t>
             </a:r>
-            <a:pPr algn="l" indent="0" marL="0">
-              <a:buNone/>
-            </a:pPr>
             <a:r>
               <a:rPr lang="en-US" sz="1400" b="1" dirty="0">
                 <a:solidFill>
@@ -11176,9 +10810,6 @@
               </a:rPr>
               <a:t>activity</a:t>
             </a:r>
-            <a:pPr algn="l" indent="0" marL="0">
-              <a:buNone/>
-            </a:pPr>
             <a:r>
               <a:rPr lang="en-US" sz="1400" dirty="0">
                 <a:solidFill>
@@ -11190,9 +10821,6 @@
               </a:rPr>
               <a:t>，但是我喜欢 </a:t>
             </a:r>
-            <a:pPr algn="l" indent="0" marL="0">
-              <a:buNone/>
-            </a:pPr>
             <a:r>
               <a:rPr lang="en-US" sz="1400" b="1" dirty="0">
                 <a:solidFill>
@@ -11204,9 +10832,6 @@
               </a:rPr>
               <a:t>activity</a:t>
             </a:r>
-            <a:pPr algn="l" indent="0" marL="0">
-              <a:buNone/>
-            </a:pPr>
             <a:r>
               <a:rPr lang="en-US" sz="1400" dirty="0">
                 <a:solidFill>
@@ -11310,9 +10935,6 @@
               </a:rPr>
               <a:t>我差不多每个周末都 </a:t>
             </a:r>
-            <a:pPr algn="l" indent="0" marL="0">
-              <a:buNone/>
-            </a:pPr>
             <a:r>
               <a:rPr lang="en-US" sz="1400" b="1" dirty="0">
                 <a:solidFill>
@@ -11324,9 +10946,6 @@
               </a:rPr>
               <a:t>verb</a:t>
             </a:r>
-            <a:pPr algn="l" indent="0" marL="0">
-              <a:buNone/>
-            </a:pPr>
             <a:r>
               <a:rPr lang="en-US" sz="1400" dirty="0">
                 <a:solidFill>
@@ -11413,9 +11032,6 @@
               </a:rPr>
               <a:t>我不太喜欢</a:t>
             </a:r>
-            <a:pPr algn="l" indent="0" marL="0">
-              <a:buNone/>
-            </a:pPr>
             <a:r>
               <a:rPr lang="en-US" sz="1200" b="1" dirty="0">
                 <a:solidFill>
@@ -11427,9 +11043,6 @@
               </a:rPr>
               <a:t>运动，</a:t>
             </a:r>
-            <a:pPr algn="l" indent="0" marL="0">
-              <a:buNone/>
-            </a:pPr>
             <a:r>
               <a:rPr lang="en-US" sz="1200" b="1" dirty="0">
                 <a:solidFill>
@@ -11441,9 +11054,6 @@
               </a:rPr>
               <a:t>但是</a:t>
             </a:r>
-            <a:pPr algn="l" indent="0" marL="0">
-              <a:buNone/>
-            </a:pPr>
             <a:r>
               <a:rPr lang="en-US" sz="1200" b="1" dirty="0">
                 <a:solidFill>
@@ -11455,9 +11065,6 @@
               </a:rPr>
               <a:t>我喜欢游泳。</a:t>
             </a:r>
-            <a:pPr algn="l" indent="0" marL="0">
-              <a:buNone/>
-            </a:pPr>
             <a:r>
               <a:rPr lang="en-US" sz="1200" dirty="0">
                 <a:solidFill>
@@ -11469,9 +11076,6 @@
               </a:rPr>
               <a:t> </a:t>
             </a:r>
-            <a:pPr algn="l" indent="0" marL="0">
-              <a:buNone/>
-            </a:pPr>
             <a:r>
               <a:rPr lang="en-US" sz="900" dirty="0">
                 <a:solidFill>
@@ -11558,9 +11162,6 @@
               </a:rPr>
               <a:t>我差不多每个周末</a:t>
             </a:r>
-            <a:pPr algn="l" indent="0" marL="0">
-              <a:buNone/>
-            </a:pPr>
             <a:r>
               <a:rPr lang="en-US" sz="1200" b="1" dirty="0">
                 <a:solidFill>
@@ -11572,9 +11173,6 @@
               </a:rPr>
               <a:t>都看电影。</a:t>
             </a:r>
-            <a:pPr algn="l" indent="0" marL="0">
-              <a:buNone/>
-            </a:pPr>
             <a:r>
               <a:rPr lang="en-US" sz="1200" dirty="0">
                 <a:solidFill>
@@ -11586,9 +11184,6 @@
               </a:rPr>
               <a:t> </a:t>
             </a:r>
-            <a:pPr algn="l" indent="0" marL="0">
-              <a:buNone/>
-            </a:pPr>
             <a:r>
               <a:rPr lang="en-US" sz="900" dirty="0">
                 <a:solidFill>
@@ -11677,9 +11272,6 @@
               </a:rPr>
               <a:t>我不太喜欢</a:t>
             </a:r>
-            <a:pPr algn="l" indent="0" marL="0">
-              <a:buNone/>
-            </a:pPr>
             <a:r>
               <a:rPr lang="en-US" sz="1200" b="1" dirty="0">
                 <a:solidFill>
@@ -11691,9 +11283,6 @@
               </a:rPr>
               <a:t>做作业，</a:t>
             </a:r>
-            <a:pPr algn="l" indent="0" marL="0">
-              <a:buNone/>
-            </a:pPr>
             <a:r>
               <a:rPr lang="en-US" sz="1200" b="1" dirty="0">
                 <a:solidFill>
@@ -11705,9 +11294,6 @@
               </a:rPr>
               <a:t>但是</a:t>
             </a:r>
-            <a:pPr algn="l" indent="0" marL="0">
-              <a:buNone/>
-            </a:pPr>
             <a:r>
               <a:rPr lang="en-US" sz="1200" b="1" dirty="0">
                 <a:solidFill>
@@ -11719,9 +11305,6 @@
               </a:rPr>
               <a:t>我很喜欢玩电脑游戏！</a:t>
             </a:r>
-            <a:pPr algn="l" indent="0" marL="0">
-              <a:buNone/>
-            </a:pPr>
             <a:r>
               <a:rPr lang="en-US" sz="1200" dirty="0">
                 <a:solidFill>
@@ -11733,9 +11316,6 @@
               </a:rPr>
               <a:t> </a:t>
             </a:r>
-            <a:pPr algn="l" indent="0" marL="0">
-              <a:buNone/>
-            </a:pPr>
             <a:r>
               <a:rPr lang="en-US" sz="700" b="1" dirty="0">
                 <a:solidFill>
@@ -11747,9 +11327,6 @@
               </a:rPr>
               <a:t>SILLY EXAMPLE</a:t>
             </a:r>
-            <a:pPr algn="l" indent="0" marL="0">
-              <a:buNone/>
-            </a:pPr>
             <a:r>
               <a:rPr lang="en-US" sz="1200" dirty="0">
                 <a:solidFill>
@@ -11761,9 +11338,6 @@
               </a:rPr>
               <a:t> </a:t>
             </a:r>
-            <a:pPr algn="l" indent="0" marL="0">
-              <a:buNone/>
-            </a:pPr>
             <a:r>
               <a:rPr lang="en-US" sz="900" dirty="0">
                 <a:solidFill>
@@ -12375,9 +11949,6 @@
               </a:rPr>
               <a:t>A</a:t>
             </a:r>
-            <a:pPr algn="l" indent="0" marL="0">
-              <a:buNone/>
-            </a:pPr>
             <a:r>
               <a:rPr lang="en-US" sz="1250" dirty="0">
                 <a:solidFill>
@@ -12389,9 +11960,6 @@
               </a:rPr>
               <a:t> </a:t>
             </a:r>
-            <a:pPr algn="l" indent="0" marL="0">
-              <a:buNone/>
-            </a:pPr>
             <a:r>
               <a:rPr lang="en-US" sz="1250" b="1" dirty="0">
                 <a:solidFill>
@@ -12403,9 +11971,6 @@
               </a:rPr>
               <a:t>我</a:t>
             </a:r>
-            <a:pPr algn="l" indent="0" marL="0">
-              <a:buNone/>
-            </a:pPr>
             <a:r>
               <a:rPr lang="en-US" sz="1250" b="1" dirty="0">
                 <a:solidFill>
@@ -12417,9 +11982,6 @@
               </a:rPr>
               <a:t>不太喜欢</a:t>
             </a:r>
-            <a:pPr algn="l" indent="0" marL="0">
-              <a:buNone/>
-            </a:pPr>
             <a:r>
               <a:rPr lang="en-US" sz="1250" b="1" dirty="0">
                 <a:solidFill>
@@ -12431,9 +11993,6 @@
               </a:rPr>
               <a:t>运动，</a:t>
             </a:r>
-            <a:pPr algn="l" indent="0" marL="0">
-              <a:buNone/>
-            </a:pPr>
             <a:r>
               <a:rPr lang="en-US" sz="1250" b="1" dirty="0">
                 <a:solidFill>
@@ -12445,9 +12004,6 @@
               </a:rPr>
               <a:t>但是</a:t>
             </a:r>
-            <a:pPr algn="l" indent="0" marL="0">
-              <a:buNone/>
-            </a:pPr>
             <a:r>
               <a:rPr lang="en-US" sz="1250" b="1" dirty="0">
                 <a:solidFill>
@@ -12476,9 +12032,6 @@
               </a:rPr>
               <a:t>B</a:t>
             </a:r>
-            <a:pPr algn="l" indent="0" marL="0">
-              <a:buNone/>
-            </a:pPr>
             <a:r>
               <a:rPr lang="en-US" sz="1250" dirty="0">
                 <a:solidFill>
@@ -12490,9 +12043,6 @@
               </a:rPr>
               <a:t> </a:t>
             </a:r>
-            <a:pPr algn="l" indent="0" marL="0">
-              <a:buNone/>
-            </a:pPr>
             <a:r>
               <a:rPr lang="en-US" sz="1250" b="1" dirty="0">
                 <a:solidFill>
@@ -12521,9 +12071,6 @@
               </a:rPr>
               <a:t>A</a:t>
             </a:r>
-            <a:pPr algn="l" indent="0" marL="0">
-              <a:buNone/>
-            </a:pPr>
             <a:r>
               <a:rPr lang="en-US" sz="1250" dirty="0">
                 <a:solidFill>
@@ -12535,9 +12082,6 @@
               </a:rPr>
               <a:t> </a:t>
             </a:r>
-            <a:pPr algn="l" indent="0" marL="0">
-              <a:buNone/>
-            </a:pPr>
             <a:r>
               <a:rPr lang="en-US" sz="1250" b="1" dirty="0">
                 <a:solidFill>
@@ -12566,9 +12110,6 @@
               </a:rPr>
               <a:t>B</a:t>
             </a:r>
-            <a:pPr algn="l" indent="0" marL="0">
-              <a:buNone/>
-            </a:pPr>
             <a:r>
               <a:rPr lang="en-US" sz="1250" dirty="0">
                 <a:solidFill>
@@ -12580,9 +12121,6 @@
               </a:rPr>
               <a:t> </a:t>
             </a:r>
-            <a:pPr algn="l" indent="0" marL="0">
-              <a:buNone/>
-            </a:pPr>
             <a:r>
               <a:rPr lang="en-US" sz="1250" b="1" dirty="0">
                 <a:solidFill>
@@ -12611,9 +12149,6 @@
               </a:rPr>
               <a:t>A</a:t>
             </a:r>
-            <a:pPr algn="l" indent="0" marL="0">
-              <a:buNone/>
-            </a:pPr>
             <a:r>
               <a:rPr lang="en-US" sz="1250" dirty="0">
                 <a:solidFill>
@@ -12625,9 +12160,6 @@
               </a:rPr>
               <a:t> </a:t>
             </a:r>
-            <a:pPr algn="l" indent="0" marL="0">
-              <a:buNone/>
-            </a:pPr>
             <a:r>
               <a:rPr lang="en-US" sz="1250" b="1" dirty="0">
                 <a:solidFill>
@@ -12656,9 +12188,6 @@
               </a:rPr>
               <a:t>B</a:t>
             </a:r>
-            <a:pPr algn="l" indent="0" marL="0">
-              <a:buNone/>
-            </a:pPr>
             <a:r>
               <a:rPr lang="en-US" sz="1250" dirty="0">
                 <a:solidFill>
@@ -12670,9 +12199,6 @@
               </a:rPr>
               <a:t> </a:t>
             </a:r>
-            <a:pPr algn="l" indent="0" marL="0">
-              <a:buNone/>
-            </a:pPr>
             <a:r>
               <a:rPr lang="en-US" sz="1250" b="1" dirty="0">
                 <a:solidFill>
@@ -12684,9 +12210,6 @@
               </a:rPr>
               <a:t>我</a:t>
             </a:r>
-            <a:pPr algn="l" indent="0" marL="0">
-              <a:buNone/>
-            </a:pPr>
             <a:r>
               <a:rPr lang="en-US" sz="1250" b="1" dirty="0">
                 <a:solidFill>
@@ -12698,9 +12221,6 @@
               </a:rPr>
               <a:t>差不多</a:t>
             </a:r>
-            <a:pPr algn="l" indent="0" marL="0">
-              <a:buNone/>
-            </a:pPr>
             <a:r>
               <a:rPr lang="en-US" sz="1250" b="1" dirty="0">
                 <a:solidFill>
@@ -12867,9 +12387,6 @@
               </a:rPr>
               <a:t>不太喜欢</a:t>
             </a:r>
-            <a:pPr algn="l" indent="0" marL="0">
-              <a:buNone/>
-            </a:pPr>
             <a:r>
               <a:rPr lang="en-US" sz="900" dirty="0">
                 <a:solidFill>
@@ -12923,6 +12440,42 @@
               </a:rPr>
               <a:t>但是</a:t>
             </a:r>
+            <a:r>
+              <a:rPr lang="en-US" sz="900" dirty="0">
+                <a:solidFill>
+                  <a:srgbClr val="5B6677"/>
+                </a:solidFill>
+                <a:latin typeface="Noto Sans SC" pitchFamily="34" charset="0"/>
+                <a:ea typeface="Noto Sans SC" pitchFamily="34" charset="-122"/>
+                <a:cs typeface="Noto Sans SC" pitchFamily="34" charset="-120"/>
+              </a:rPr>
+              <a:t> but</a:t>
+            </a:r>
+            <a:endParaRPr lang="en-US" sz="900" dirty="0"/>
+          </a:p>
+        </p:txBody>
+      </p:sp>
+      <p:sp>
+        <p:nvSpPr>
+          <p:cNvPr id="17" name="Text 15"/>
+          <p:cNvSpPr/>
+          <p:nvPr/>
+        </p:nvSpPr>
+        <p:spPr>
+          <a:xfrm>
+            <a:off x="9296400" y="1784152"/>
+            <a:ext cx="2305913" cy="200025"/>
+          </a:xfrm>
+          <a:prstGeom prst="rect">
+            <a:avLst/>
+          </a:prstGeom>
+          <a:noFill/>
+          <a:ln/>
+        </p:spPr>
+        <p:txBody>
+          <a:bodyPr wrap="square" lIns="0" tIns="0" rIns="0" bIns="0" rtlCol="0" anchor="t"/>
+          <a:lstStyle/>
+          <a:p>
             <a:pPr algn="l" indent="0" marL="0">
               <a:spcBef>
                 <a:spcPts val="300"/>
@@ -12930,48 +12483,6 @@
               <a:buNone/>
             </a:pPr>
             <a:r>
-              <a:rPr lang="en-US" sz="900" dirty="0">
-                <a:solidFill>
-                  <a:srgbClr val="5B6677"/>
-                </a:solidFill>
-                <a:latin typeface="Noto Sans SC" pitchFamily="34" charset="0"/>
-                <a:ea typeface="Noto Sans SC" pitchFamily="34" charset="-122"/>
-                <a:cs typeface="Noto Sans SC" pitchFamily="34" charset="-120"/>
-              </a:rPr>
-              <a:t> but</a:t>
-            </a:r>
-            <a:endParaRPr lang="en-US" sz="900" dirty="0"/>
-          </a:p>
-        </p:txBody>
-      </p:sp>
-      <p:sp>
-        <p:nvSpPr>
-          <p:cNvPr id="17" name="Text 15"/>
-          <p:cNvSpPr/>
-          <p:nvPr/>
-        </p:nvSpPr>
-        <p:spPr>
-          <a:xfrm>
-            <a:off x="9296400" y="1784152"/>
-            <a:ext cx="2305913" cy="200025"/>
-          </a:xfrm>
-          <a:prstGeom prst="rect">
-            <a:avLst/>
-          </a:prstGeom>
-          <a:noFill/>
-          <a:ln/>
-        </p:spPr>
-        <p:txBody>
-          <a:bodyPr wrap="square" lIns="0" tIns="0" rIns="0" bIns="0" rtlCol="0" anchor="t"/>
-          <a:lstStyle/>
-          <a:p>
-            <a:pPr algn="l" indent="0" marL="0">
-              <a:spcBef>
-                <a:spcPts val="300"/>
-              </a:spcBef>
-              <a:buNone/>
-            </a:pPr>
-            <a:r>
               <a:rPr lang="en-US" sz="1100" b="1" dirty="0">
                 <a:solidFill>
                   <a:srgbClr val="C8943E"/>
@@ -12982,12 +12493,6 @@
               </a:rPr>
               <a:t>差不多</a:t>
             </a:r>
-            <a:pPr algn="l" indent="0" marL="0">
-              <a:spcBef>
-                <a:spcPts val="300"/>
-              </a:spcBef>
-              <a:buNone/>
-            </a:pPr>
             <a:r>
               <a:rPr lang="en-US" sz="900" dirty="0">
                 <a:solidFill>
@@ -13116,9 +12621,6 @@
               </a:rPr>
               <a:t>Q1</a:t>
             </a:r>
-            <a:pPr algn="l" indent="0" marL="0">
-              <a:buNone/>
-            </a:pPr>
             <a:r>
               <a:rPr lang="en-US" sz="950" dirty="0">
                 <a:solidFill>
@@ -13172,6 +12674,42 @@
               </a:rPr>
               <a:t>Q2</a:t>
             </a:r>
+            <a:r>
+              <a:rPr lang="en-US" sz="950" dirty="0">
+                <a:solidFill>
+                  <a:srgbClr val="1E2A38"/>
+                </a:solidFill>
+                <a:latin typeface="Noto Sans SC" pitchFamily="34" charset="0"/>
+                <a:ea typeface="Noto Sans SC" pitchFamily="34" charset="-122"/>
+                <a:cs typeface="Noto Sans SC" pitchFamily="34" charset="-120"/>
+              </a:rPr>
+              <a:t> What kind of TV programme does B like?</a:t>
+            </a:r>
+            <a:endParaRPr lang="en-US" sz="950" dirty="0"/>
+          </a:p>
+        </p:txBody>
+      </p:sp>
+      <p:sp>
+        <p:nvSpPr>
+          <p:cNvPr id="22" name="Text 20"/>
+          <p:cNvSpPr/>
+          <p:nvPr/>
+        </p:nvSpPr>
+        <p:spPr>
+          <a:xfrm>
+            <a:off x="9305925" y="3396853"/>
+            <a:ext cx="2286482" cy="161925"/>
+          </a:xfrm>
+          <a:prstGeom prst="rect">
+            <a:avLst/>
+          </a:prstGeom>
+          <a:noFill/>
+          <a:ln/>
+        </p:spPr>
+        <p:txBody>
+          <a:bodyPr wrap="square" lIns="0" tIns="0" rIns="0" bIns="0" rtlCol="0" anchor="t"/>
+          <a:lstStyle/>
+          <a:p>
             <a:pPr algn="l" indent="0" marL="0">
               <a:spcBef>
                 <a:spcPts val="600"/>
@@ -13179,48 +12717,6 @@
               <a:buNone/>
             </a:pPr>
             <a:r>
-              <a:rPr lang="en-US" sz="950" dirty="0">
-                <a:solidFill>
-                  <a:srgbClr val="1E2A38"/>
-                </a:solidFill>
-                <a:latin typeface="Noto Sans SC" pitchFamily="34" charset="0"/>
-                <a:ea typeface="Noto Sans SC" pitchFamily="34" charset="-122"/>
-                <a:cs typeface="Noto Sans SC" pitchFamily="34" charset="-120"/>
-              </a:rPr>
-              <a:t> What kind of TV programme does B like?</a:t>
-            </a:r>
-            <a:endParaRPr lang="en-US" sz="950" dirty="0"/>
-          </a:p>
-        </p:txBody>
-      </p:sp>
-      <p:sp>
-        <p:nvSpPr>
-          <p:cNvPr id="22" name="Text 20"/>
-          <p:cNvSpPr/>
-          <p:nvPr/>
-        </p:nvSpPr>
-        <p:spPr>
-          <a:xfrm>
-            <a:off x="9305925" y="3396853"/>
-            <a:ext cx="2286482" cy="161925"/>
-          </a:xfrm>
-          <a:prstGeom prst="rect">
-            <a:avLst/>
-          </a:prstGeom>
-          <a:noFill/>
-          <a:ln/>
-        </p:spPr>
-        <p:txBody>
-          <a:bodyPr wrap="square" lIns="0" tIns="0" rIns="0" bIns="0" rtlCol="0" anchor="t"/>
-          <a:lstStyle/>
-          <a:p>
-            <a:pPr algn="l" indent="0" marL="0">
-              <a:spcBef>
-                <a:spcPts val="600"/>
-              </a:spcBef>
-              <a:buNone/>
-            </a:pPr>
-            <a:r>
               <a:rPr lang="en-US" sz="950" b="1" dirty="0">
                 <a:solidFill>
                   <a:srgbClr val="3A7D8C"/>
@@ -13231,12 +12727,6 @@
               </a:rPr>
               <a:t>Q3</a:t>
             </a:r>
-            <a:pPr algn="l" indent="0" marL="0">
-              <a:spcBef>
-                <a:spcPts val="600"/>
-              </a:spcBef>
-              <a:buNone/>
-            </a:pPr>
             <a:r>
               <a:rPr lang="en-US" sz="950" dirty="0">
                 <a:solidFill>
@@ -13541,12 +13031,6 @@
               </a:rPr>
               <a:t>Write your answer on your mini whiteboard </a:t>
             </a:r>
-            <a:pPr algn="l" indent="0" marL="0">
-              <a:spcBef>
-                <a:spcPts val="300"/>
-              </a:spcBef>
-              <a:buNone/>
-            </a:pPr>
             <a:r>
               <a:rPr lang="en-US" sz="1000" b="1" dirty="0">
                 <a:solidFill>
@@ -13850,9 +13334,6 @@
               </a:rPr>
               <a:t>Thumbs up if </a:t>
             </a:r>
-            <a:pPr algn="l" indent="0" marL="0">
-              <a:buNone/>
-            </a:pPr>
             <a:r>
               <a:rPr lang="en-US" sz="1400" b="1" dirty="0">
                 <a:solidFill>
@@ -13864,9 +13345,6 @@
               </a:rPr>
               <a:t>但是</a:t>
             </a:r>
-            <a:pPr algn="l" indent="0" marL="0">
-              <a:buNone/>
-            </a:pPr>
             <a:r>
               <a:rPr lang="en-US" sz="1200" dirty="0">
                 <a:solidFill>
@@ -14024,9 +13502,6 @@
               </a:rPr>
               <a:t>Error correction: </a:t>
             </a:r>
-            <a:pPr algn="l" indent="0" marL="0">
-              <a:buNone/>
-            </a:pPr>
             <a:r>
               <a:rPr lang="en-US" sz="1400" b="1" dirty="0">
                 <a:solidFill>
@@ -14038,9 +13513,6 @@
               </a:rPr>
               <a:t>我喜欢不太运动。</a:t>
             </a:r>
-            <a:pPr algn="l" indent="0" marL="0">
-              <a:buNone/>
-            </a:pPr>
             <a:r>
               <a:rPr lang="en-US" sz="1200" dirty="0">
                 <a:solidFill>
@@ -15545,9 +15017,6 @@
               </a:rPr>
               <a:t>Teacher shows each </a:t>
             </a:r>
-            <a:pPr algn="l" indent="0" marL="0">
-              <a:buNone/>
-            </a:pPr>
             <a:r>
               <a:rPr lang="en-US" sz="1050" b="1" dirty="0">
                 <a:solidFill>
@@ -15559,9 +15028,6 @@
               </a:rPr>
               <a:t>Text 2 word</a:t>
             </a:r>
-            <a:pPr algn="l" indent="0" marL="0">
-              <a:buNone/>
-            </a:pPr>
             <a:r>
               <a:rPr lang="en-US" sz="1050" dirty="0">
                 <a:solidFill>
@@ -15573,9 +15039,6 @@
               </a:rPr>
               <a:t> on the projector in random order — class chorally says </a:t>
             </a:r>
-            <a:pPr algn="l" indent="0" marL="0">
-              <a:buNone/>
-            </a:pPr>
             <a:r>
               <a:rPr lang="en-US" sz="1050" b="1" dirty="0">
                 <a:solidFill>
@@ -15605,9 +15068,6 @@
               </a:rPr>
               <a:t>Second pass:</a:t>
             </a:r>
-            <a:pPr algn="l" indent="0" marL="0">
-              <a:buNone/>
-            </a:pPr>
             <a:r>
               <a:rPr lang="en-US" sz="1050" dirty="0">
                 <a:solidFill>
@@ -15707,9 +15167,6 @@
               </a:rPr>
               <a:t>太</a:t>
             </a:r>
-            <a:pPr algn="l" indent="0" marL="0">
-              <a:buNone/>
-            </a:pPr>
             <a:r>
               <a:rPr lang="en-US" sz="950" dirty="0">
                 <a:solidFill>
@@ -15721,9 +15178,6 @@
               </a:rPr>
               <a:t> — too </a:t>
             </a:r>
-            <a:pPr algn="l" indent="0" marL="0">
-              <a:buNone/>
-            </a:pPr>
             <a:r>
               <a:rPr lang="en-US" sz="950" b="1" dirty="0">
                 <a:solidFill>
@@ -15735,9 +15189,6 @@
               </a:rPr>
               <a:t>但</a:t>
             </a:r>
-            <a:pPr algn="l" indent="0" marL="0">
-              <a:buNone/>
-            </a:pPr>
             <a:r>
               <a:rPr lang="en-US" sz="950" dirty="0">
                 <a:solidFill>
@@ -15766,9 +15217,6 @@
               </a:rPr>
               <a:t>但是</a:t>
             </a:r>
-            <a:pPr algn="l" indent="0" marL="0">
-              <a:buNone/>
-            </a:pPr>
             <a:r>
               <a:rPr lang="en-US" sz="950" dirty="0">
                 <a:solidFill>
@@ -15797,9 +15245,6 @@
               </a:rPr>
               <a:t>视(視)</a:t>
             </a:r>
-            <a:pPr algn="l" indent="0" marL="0">
-              <a:buNone/>
-            </a:pPr>
             <a:r>
               <a:rPr lang="en-US" sz="950" dirty="0">
                 <a:solidFill>
@@ -15811,9 +15256,6 @@
               </a:rPr>
               <a:t> — look; view </a:t>
             </a:r>
-            <a:pPr algn="l" indent="0" marL="0">
-              <a:buNone/>
-            </a:pPr>
             <a:r>
               <a:rPr lang="en-US" sz="950" b="1" dirty="0">
                 <a:solidFill>
@@ -15825,9 +15267,6 @@
               </a:rPr>
               <a:t>电视</a:t>
             </a:r>
-            <a:pPr algn="l" indent="0" marL="0">
-              <a:buNone/>
-            </a:pPr>
             <a:r>
               <a:rPr lang="en-US" sz="950" dirty="0">
                 <a:solidFill>
@@ -15856,9 +15295,6 @@
               </a:rPr>
               <a:t>影</a:t>
             </a:r>
-            <a:pPr algn="l" indent="0" marL="0">
-              <a:buNone/>
-            </a:pPr>
             <a:r>
               <a:rPr lang="en-US" sz="950" dirty="0">
                 <a:solidFill>
@@ -15870,9 +15306,6 @@
               </a:rPr>
               <a:t> — shadow; film </a:t>
             </a:r>
-            <a:pPr algn="l" indent="0" marL="0">
-              <a:buNone/>
-            </a:pPr>
             <a:r>
               <a:rPr lang="en-US" sz="950" b="1" dirty="0">
                 <a:solidFill>
@@ -15884,9 +15317,6 @@
               </a:rPr>
               <a:t>电影</a:t>
             </a:r>
-            <a:pPr algn="l" indent="0" marL="0">
-              <a:buNone/>
-            </a:pPr>
             <a:r>
               <a:rPr lang="en-US" sz="950" dirty="0">
                 <a:solidFill>
@@ -15915,9 +15345,6 @@
               </a:rPr>
               <a:t>节(節)</a:t>
             </a:r>
-            <a:pPr algn="l" indent="0" marL="0">
-              <a:buNone/>
-            </a:pPr>
             <a:r>
               <a:rPr lang="en-US" sz="950" dirty="0">
                 <a:solidFill>
@@ -15946,9 +15373,6 @@
               </a:rPr>
               <a:t>节目</a:t>
             </a:r>
-            <a:pPr algn="l" indent="0" marL="0">
-              <a:buNone/>
-            </a:pPr>
             <a:r>
               <a:rPr lang="en-US" sz="950" dirty="0">
                 <a:solidFill>
@@ -15960,9 +15384,6 @@
               </a:rPr>
               <a:t> — programme </a:t>
             </a:r>
-            <a:pPr algn="l" indent="0" marL="0">
-              <a:buNone/>
-            </a:pPr>
             <a:r>
               <a:rPr lang="en-US" sz="950" b="1" dirty="0">
                 <a:solidFill>
@@ -15974,9 +15395,6 @@
               </a:rPr>
               <a:t>差不多</a:t>
             </a:r>
-            <a:pPr algn="l" indent="0" marL="0">
-              <a:buNone/>
-            </a:pPr>
             <a:r>
               <a:rPr lang="en-US" sz="950" dirty="0">
                 <a:solidFill>
@@ -16005,9 +15423,6 @@
               </a:rPr>
               <a:t>周</a:t>
             </a:r>
-            <a:pPr algn="l" indent="0" marL="0">
-              <a:buNone/>
-            </a:pPr>
             <a:r>
               <a:rPr lang="en-US" sz="950" dirty="0">
                 <a:solidFill>
@@ -16019,9 +15434,6 @@
               </a:rPr>
               <a:t> — week </a:t>
             </a:r>
-            <a:pPr algn="l" indent="0" marL="0">
-              <a:buNone/>
-            </a:pPr>
             <a:r>
               <a:rPr lang="en-US" sz="950" b="1" dirty="0">
                 <a:solidFill>
@@ -16033,9 +15445,6 @@
               </a:rPr>
               <a:t>末</a:t>
             </a:r>
-            <a:pPr algn="l" indent="0" marL="0">
-              <a:buNone/>
-            </a:pPr>
             <a:r>
               <a:rPr lang="en-US" sz="950" dirty="0">
                 <a:solidFill>
@@ -16047,9 +15456,6 @@
               </a:rPr>
               <a:t> — end </a:t>
             </a:r>
-            <a:pPr algn="l" indent="0" marL="0">
-              <a:buNone/>
-            </a:pPr>
             <a:r>
               <a:rPr lang="en-US" sz="950" b="1" dirty="0">
                 <a:solidFill>
@@ -16061,9 +15467,6 @@
               </a:rPr>
               <a:t>周末</a:t>
             </a:r>
-            <a:pPr algn="l" indent="0" marL="0">
-              <a:buNone/>
-            </a:pPr>
             <a:r>
               <a:rPr lang="en-US" sz="950" dirty="0">
                 <a:solidFill>
